--- a/management-seminars/week01_course_overview.pptx
+++ b/management-seminars/week01_course_overview.pptx
@@ -506,7 +506,7 @@
           <a:lstStyle/>
           <a:p>
             <a:r>
-              <a:t>Management seminar for week 1: Course Overview. We will go through what the course covers, the four lecture types, how the labs work, and the course arc. Provide opening remarks here.</a:t>
+              <a:t>Management seminar for week 1: Course Overview. We will go through what the course covers, the four seminar types, how the labs work, and the course arc. Provide opening remarks here.</a:t>
             </a:r>
           </a:p>
         </p:txBody>
@@ -1506,7 +1506,7 @@
 </p:sldMaster>
 </file>
 
-<file path=ppt/slides/slide11.xml><?xml version="1.0" encoding="utf-8"?>
+<file path=ppt/slides/slide1.xml><?xml version="1.0" encoding="utf-8"?>
 <p:sld xmlns:a="http://schemas.openxmlformats.org/drawingml/2006/main" xmlns:p="http://schemas.openxmlformats.org/presentationml/2006/main" xmlns:r="http://schemas.openxmlformats.org/officeDocument/2006/relationships">
   <p:cSld>
     <p:spTree>
@@ -1600,7 +1600,7 @@
 </p:sld>
 </file>
 
-<file path=ppt/slides/slide12.xml><?xml version="1.0" encoding="utf-8"?>
+<file path=ppt/slides/slide2.xml><?xml version="1.0" encoding="utf-8"?>
 <p:sld xmlns:a="http://schemas.openxmlformats.org/drawingml/2006/main" xmlns:p="http://schemas.openxmlformats.org/presentationml/2006/main" xmlns:r="http://schemas.openxmlformats.org/officeDocument/2006/relationships">
   <p:cSld>
     <p:spTree>
@@ -1797,7 +1797,7 @@
 </p:sld>
 </file>
 
-<file path=ppt/slides/slide13.xml><?xml version="1.0" encoding="utf-8"?>
+<file path=ppt/slides/slide3.xml><?xml version="1.0" encoding="utf-8"?>
 <p:sld xmlns:a="http://schemas.openxmlformats.org/drawingml/2006/main" xmlns:p="http://schemas.openxmlformats.org/presentationml/2006/main" xmlns:r="http://schemas.openxmlformats.org/officeDocument/2006/relationships">
   <p:cSld>
     <p:spTree>
@@ -1839,7 +1839,7 @@
                   <a:srgbClr val="FFFFFF"/>
                 </a:solidFill>
               </a:rPr>
-              <a:t>Four lecture types each week</a:t>
+              <a:t>Four seminar types each week</a:t>
             </a:r>
             <a:endParaRPr lang="en-US" sz="3200" dirty="0"/>
           </a:p>
@@ -1994,7 +1994,7 @@
 </p:sld>
 </file>
 
-<file path=ppt/slides/slide14.xml><?xml version="1.0" encoding="utf-8"?>
+<file path=ppt/slides/slide4.xml><?xml version="1.0" encoding="utf-8"?>
 <p:sld xmlns:a="http://schemas.openxmlformats.org/drawingml/2006/main" xmlns:p="http://schemas.openxmlformats.org/presentationml/2006/main" xmlns:r="http://schemas.openxmlformats.org/officeDocument/2006/relationships">
   <p:cSld>
     <p:spTree>
@@ -2191,7 +2191,7 @@
 </p:sld>
 </file>
 
-<file path=ppt/slides/slide15.xml><?xml version="1.0" encoding="utf-8"?>
+<file path=ppt/slides/slide5.xml><?xml version="1.0" encoding="utf-8"?>
 <p:sld xmlns:a="http://schemas.openxmlformats.org/drawingml/2006/main" xmlns:p="http://schemas.openxmlformats.org/presentationml/2006/main" xmlns:r="http://schemas.openxmlformats.org/officeDocument/2006/relationships">
   <p:cSld>
     <p:spTree>
@@ -2388,7 +2388,7 @@
 </p:sld>
 </file>
 
-<file path=ppt/slides/slide16.xml><?xml version="1.0" encoding="utf-8"?>
+<file path=ppt/slides/slide6.xml><?xml version="1.0" encoding="utf-8"?>
 <p:sld xmlns:a="http://schemas.openxmlformats.org/drawingml/2006/main" xmlns:p="http://schemas.openxmlformats.org/presentationml/2006/main" xmlns:r="http://schemas.openxmlformats.org/officeDocument/2006/relationships">
   <p:cSld>
     <p:spTree>

--- a/management-seminars/week01_course_overview.pptx
+++ b/management-seminars/week01_course_overview.pptx
@@ -11,6 +11,7 @@
     <p:sldId id="269" r:id="rId20"/>
     <p:sldId id="270" r:id="rId21"/>
     <p:sldId id="271" r:id="rId22"/>
+    <p:sldId id="272" r:id="rId11"/>
   </p:sldIdLst>
   <p:notesMasterIdLst>
     <p:notesMasterId r:id="rId12"/>
@@ -857,6 +858,76 @@
           <a:p>
             <a:r>
               <a:t>Students install the tools in the first week; a setup checker confirms everything works. The data warehouse looks like what a health plan and a regional hospital system would hold: members and coverage, medical and pharmacy claims, prior authorizations, care management, a hospital payment ledger, providers and area-level measures. It is fully synthetic but has realistic messiness: churn, denials, small denominators and selection bias.</a:t>
+            </a:r>
+          </a:p>
+        </p:txBody>
+      </p:sp>
+      <p:sp>
+        <p:nvSpPr>
+          <p:cNvPr id="4" name="Slide Number Placeholder 3"/>
+          <p:cNvSpPr>
+            <a:spLocks noGrp="1"/>
+          </p:cNvSpPr>
+          <p:nvPr>
+            <p:ph type="sldNum" idx="5" sz="quarter"/>
+          </p:nvPr>
+        </p:nvSpPr>
+        <p:spPr/>
+      </p:sp>
+    </p:spTree>
+  </p:cSld>
+  <p:clrMapOvr>
+    <a:masterClrMapping/>
+  </p:clrMapOvr>
+</p:notes>
+</file>
+
+<file path=ppt/notesSlides/notesSlide7.xml><?xml version="1.0" encoding="utf-8"?>
+<p:notes xmlns:a="http://schemas.openxmlformats.org/drawingml/2006/main" xmlns:p="http://schemas.openxmlformats.org/presentationml/2006/main" xmlns:r="http://schemas.openxmlformats.org/officeDocument/2006/relationships">
+  <p:cSld>
+    <p:spTree>
+      <p:nvGrpSpPr>
+        <p:cNvPr id="1" name=""/>
+        <p:cNvGrpSpPr/>
+        <p:nvPr/>
+      </p:nvGrpSpPr>
+      <p:grpSpPr>
+        <a:xfrm>
+          <a:off x="0" y="0"/>
+          <a:ext cx="0" cy="0"/>
+          <a:chOff x="0" y="0"/>
+          <a:chExt cx="0" cy="0"/>
+        </a:xfrm>
+      </p:grpSpPr>
+      <p:sp>
+        <p:nvSpPr>
+          <p:cNvPr id="2" name="Slide Image Placeholder 1"/>
+          <p:cNvSpPr>
+            <a:spLocks noGrp="1"/>
+          </p:cNvSpPr>
+          <p:nvPr>
+            <p:ph type="sldImg" idx="2"/>
+          </p:nvPr>
+        </p:nvSpPr>
+        <p:spPr/>
+      </p:sp>
+      <p:sp>
+        <p:nvSpPr>
+          <p:cNvPr id="3" name="Notes Placeholder 2"/>
+          <p:cNvSpPr>
+            <a:spLocks noGrp="1"/>
+          </p:cNvSpPr>
+          <p:nvPr>
+            <p:ph type="body" idx="3" sz="quarter"/>
+          </p:nvPr>
+        </p:nvSpPr>
+        <p:spPr/>
+        <p:txBody>
+          <a:bodyPr/>
+          <a:lstStyle/>
+          <a:p>
+            <a:r>
+              <a:t>Give students a few minutes to write an answer drawn from their own experience and career, then ask two or three to share. Connect their examples back to this seminar's content. In an online section, post the same question to the discussion board.</a:t>
             </a:r>
           </a:p>
         </p:txBody>
@@ -2572,6 +2643,167 @@
             <a:fld id="{F7021451-1387-4CA6-816F-3879F97B5CBC}" type="slidenum">
               <a:rPr b="0" lang="en-US"/>
               <a:t>6</a:t>
+            </a:fld>
+            <a:endParaRPr lang="en-US"/>
+          </a:p>
+        </p:txBody>
+      </p:sp>
+    </p:spTree>
+  </p:cSld>
+  <p:clrMapOvr>
+    <a:masterClrMapping/>
+  </p:clrMapOvr>
+</p:sld>
+</file>
+
+<file path=ppt/slides/slide7.xml><?xml version="1.0" encoding="utf-8"?>
+<p:sld xmlns:a="http://schemas.openxmlformats.org/drawingml/2006/main" xmlns:p="http://schemas.openxmlformats.org/presentationml/2006/main" xmlns:r="http://schemas.openxmlformats.org/officeDocument/2006/relationships">
+  <p:cSld>
+    <p:spTree>
+      <p:nvGrpSpPr>
+        <p:cNvPr id="1" name=""/>
+        <p:cNvGrpSpPr/>
+        <p:nvPr/>
+      </p:nvGrpSpPr>
+      <p:grpSpPr/>
+      <p:sp>
+        <p:nvSpPr>
+          <p:cNvPr id="2" name="Text 0"/>
+          <p:cNvSpPr/>
+          <p:nvPr>
+            <p:ph idx="100" type="title" hasCustomPrompt="1"/>
+          </p:nvPr>
+        </p:nvSpPr>
+        <p:spPr>
+          <a:xfrm>
+            <a:off x="731520" y="457200"/>
+            <a:ext cx="10698480" cy="822960"/>
+          </a:xfrm>
+          <a:prstGeom prst="rect">
+            <a:avLst/>
+          </a:prstGeom>
+          <a:noFill/>
+          <a:ln/>
+        </p:spPr>
+        <p:txBody>
+          <a:bodyPr wrap="square" lIns="0" tIns="0" rIns="0" bIns="0" rtlCol="0" anchor="t"/>
+          <a:lstStyle/>
+          <a:p>
+            <a:pPr algn="l" indent="0" marL="0">
+              <a:buNone/>
+            </a:pPr>
+            <a:r>
+              <a:rPr lang="en-US" sz="3200" b="1" dirty="0">
+                <a:solidFill>
+                  <a:srgbClr val="FFFFFF"/>
+                </a:solidFill>
+              </a:rPr>
+              <a:t>Discussion</a:t>
+            </a:r>
+            <a:endParaRPr lang="en-US" sz="3200" dirty="0"/>
+          </a:p>
+        </p:txBody>
+      </p:sp>
+      <p:sp>
+        <p:nvSpPr>
+          <p:cNvPr id="3" name="Text 0"/>
+          <p:cNvSpPr/>
+          <p:nvPr>
+            <p:ph idx="101" type="body" hasCustomPrompt="1"/>
+          </p:nvPr>
+        </p:nvSpPr>
+        <p:spPr>
+          <a:xfrm>
+            <a:off x="731520" y="1554480"/>
+            <a:ext cx="10698480" cy="4754880"/>
+          </a:xfrm>
+          <a:prstGeom prst="rect">
+            <a:avLst/>
+          </a:prstGeom>
+          <a:noFill/>
+          <a:ln/>
+        </p:spPr>
+        <p:txBody>
+          <a:bodyPr wrap="square" rtlCol="0" anchor="t"/>
+          <a:lstStyle/>
+          <a:p>
+            <a:pPr algn="l" marL="342900" indent="-342900">
+              <a:spcAft>
+                <a:spcPts val="1000"/>
+              </a:spcAft>
+              <a:buSzPct val="100000"/>
+              <a:buChar char="•"/>
+            </a:pPr>
+            <a:r>
+              <a:rPr lang="en-US" sz="2400" dirty="0">
+                <a:solidFill>
+                  <a:srgbClr val="FFFFFF"/>
+                </a:solidFill>
+              </a:rPr>
+              <a:t>What decision at work would have gone better with stronger data, and what do you want to be able to do by the end of this course?</a:t>
+            </a:r>
+            <a:endParaRPr lang="en-US" sz="2400" dirty="0"/>
+          </a:p>
+          <a:p>
+            <a:pPr algn="l" marL="342900" indent="-342900">
+              <a:spcAft>
+                <a:spcPts val="1000"/>
+              </a:spcAft>
+              <a:buSzPct val="100000"/>
+              <a:buChar char="•"/>
+            </a:pPr>
+            <a:r>
+              <a:rPr lang="en-US" sz="2400" dirty="0">
+                <a:solidFill>
+                  <a:srgbClr val="FFFFFF"/>
+                </a:solidFill>
+              </a:rPr>
+              <a:t>Draw on your own experience and career, and apply today's seminar to that setting.</a:t>
+            </a:r>
+            <a:endParaRPr lang="en-US" sz="2400" dirty="0"/>
+          </a:p>
+        </p:txBody>
+      </p:sp>
+      <p:sp>
+        <p:nvSpPr>
+          <p:cNvPr id="25" name="Slide Number Placeholder 0"/>
+          <p:cNvSpPr>
+            <a:spLocks noGrp="1"/>
+          </p:cNvSpPr>
+          <p:nvPr>
+            <p:ph type="sldNum" sz="quarter" idx="4294967295"/>
+          </p:nvPr>
+        </p:nvSpPr>
+        <p:spPr>
+          <a:xfrm>
+            <a:off x="10972800" y="6400800"/>
+            <a:ext cx="548640" cy="274320"/>
+          </a:xfrm>
+          <a:prstGeom prst="rect">
+            <a:avLst/>
+          </a:prstGeom>
+          <a:extLst>
+            <a:ext uri="{C572A759-6A51-4108-AA02-DFA0A04FC94B}">
+              <ma14:wrappingTextBoxFlag xmlns:ma14="http://schemas.microsoft.com/office/mac/drawingml/2011/main" val="0"/>
+            </a:ext>
+          </a:extLst>
+        </p:spPr>
+        <p:txBody>
+          <a:bodyPr/>
+          <a:lstStyle>
+            <a:lvl1pPr>
+              <a:defRPr sz="1000">
+                <a:solidFill>
+                  <a:srgbClr val="BFBFBF"/>
+                </a:solidFill>
+              </a:defRPr>
+            </a:lvl1pPr>
+          </a:lstStyle>
+          <a:p>
+            <a:pPr algn="r"/>
+            <a:fld id="{F7021451-1387-4CA6-816F-3879F97B5CBC}" type="slidenum">
+              <a:rPr b="0" lang="en-US"/>
+              <a:t>7</a:t>
             </a:fld>
             <a:endParaRPr lang="en-US"/>
           </a:p>

--- a/management-seminars/week01_course_overview.pptx
+++ b/management-seminars/week01_course_overview.pptx
@@ -1619,7 +1619,7 @@
                   <a:srgbClr val="FFFFFF"/>
                 </a:solidFill>
               </a:rPr>
-              <a:t>Course Overview</a:t>
+              <a:t>Week 1: Course Overview</a:t>
             </a:r>
             <a:endParaRPr lang="en-US" sz="4000" dirty="0"/>
           </a:p>
